--- a/site/addin/interaction-template.pptx
+++ b/site/addin/interaction-template.pptx
@@ -3285,7 +3285,7 @@
 
 <file path=ppt/slides/udata/data.xml><?xml version="1.0" encoding="utf-8"?>
 <we:webextension xmlns:r="http://schemas.openxmlformats.org/officeDocument/2006/relationships" xmlns:we="http://schemas.microsoft.com/office/webextensions/webextension/2010/11" id="{aae5001e-6872-4edb-aea5-1351ae3b275d}">
-  <we:reference id="aae5001e-6872-4edb-aea5-1351ae3b275d" version="1.0.0.0" store="developer" storeType="Registry"/>
+  <we:reference id="aae5001e-6872-4edb-aea5-1351ae3b275d" version="1.1.0.0" store="developer" storeType="Registry"/>
   <we:alternateReferences/>
   <we:properties/>
   <we:bindings/>

--- a/site/addin/interaction-template.pptx
+++ b/site/addin/interaction-template.pptx
@@ -3285,7 +3285,7 @@
 
 <file path=ppt/slides/udata/data.xml><?xml version="1.0" encoding="utf-8"?>
 <we:webextension xmlns:r="http://schemas.openxmlformats.org/officeDocument/2006/relationships" xmlns:we="http://schemas.microsoft.com/office/webextensions/webextension/2010/11" id="{aae5001e-6872-4edb-aea5-1351ae3b275d}">
-  <we:reference id="aae5001e-6872-4edb-aea5-1351ae3b275d" version="1.1.0.0" store="developer" storeType="Registry"/>
+  <we:reference id="aae5001e-6872-4edb-aea5-1351ae3b275d" version="1.2.0.0" store="developer" storeType="Registry"/>
   <we:alternateReferences/>
   <we:properties/>
   <we:bindings/>
